--- a/library/seminars/sem-06/rendered/sem-06-n41.pptx
+++ b/library/seminars/sem-06/rendered/sem-06-n41.pptx
@@ -502,7 +502,7 @@
           <a:lstStyle/>
           <a:p>
             <a:r>
-              <a:t>Документация харнесса об устройстве контекстных окон приводит свой пример: роль прочитала 6100 токенов файлов, вы получили итог в 420 токенов — это и есть экономия контекста. Разница на порядок, и направление то же самое, что мы сейчас получили счётом: сорок файлов остаются в окне роли, в окно родителя приходит только итог.</a:t>
+              <a:t>Документация харнесса об устройстве контекста приводит свой пример: роль прочитала 6100 токенов файлов, вы получили итог в 420 токенов — это и есть экономия контекста. Разница на порядок, и направление то же самое, что мы сейчас получили счётом: сорок файлов остаются в контексте роли, в сессию приходит только итог.</a:t>
             </a:r>
           </a:p>
           <a:p/>
@@ -520,7 +520,7 @@
           <a:p/>
           <a:p>
             <a:r>
-              <a:t>Если спросят, что именно считалось бы честным измерением: один и тот же вопрос, прогнанный в двух режимах на выборке настоящих сессий — чтение в основном окне против делегирования, — с замером занятой доли окна в обоих. Такой работы в открытых источниках нет; если кто-то из вас её сделает на своём проекте, это ровно та цифра, которой курсу не хватает.</a:t>
+              <a:t>Если спросят, что именно считалось бы честным измерением: один и тот же вопрос, прогнанный в двух режимах на выборке настоящих сессий — чтение в рабочей сессии против делегирования, — с замером занятой доли контекста в обоих. Такой работы в открытых источниках нет; если кто-то из вас её сделает на своём проекте, это ровно та цифра, которой курсу не хватает.</a:t>
             </a:r>
           </a:p>
           <a:p/>
@@ -3678,7 +3678,7 @@
                 </a:solidFill>
                 <a:latin typeface="Arial"/>
               </a:rPr>
-              <a:t> — документация харнесса об устройстве контекстных окон, один показательный сценарий.</a:t>
+              <a:t> — документация харнесса об устройстве контекста, один показательный сценарий.</a:t>
             </a:r>
           </a:p>
         </p:txBody>
@@ -3908,7 +3908,7 @@
                 </a:solidFill>
                 <a:latin typeface="Arial"/>
               </a:rPr>
-              <a:t>41</a:t>
+              <a:t>42</a:t>
             </a:r>
           </a:p>
         </p:txBody>
